--- a/assessment/presentation/DAT5001-TomRowan-ST20285213-From_Launch_to_Litter_Orbital_Overload.pptx
+++ b/assessment/presentation/DAT5001-TomRowan-ST20285213-From_Launch_to_Litter_Orbital_Overload.pptx
@@ -24,12 +24,13 @@
     <p:sldId id="262" r:id="rId18"/>
     <p:sldId id="263" r:id="rId19"/>
     <p:sldId id="264" r:id="rId20"/>
-    <p:sldId id="265" r:id="rId21"/>
-    <p:sldId id="266" r:id="rId22"/>
-    <p:sldId id="267" r:id="rId23"/>
-    <p:sldId id="268" r:id="rId24"/>
-    <p:sldId id="269" r:id="rId25"/>
-    <p:sldId id="270" r:id="rId26"/>
+    <p:sldId id="271" r:id="rId21"/>
+    <p:sldId id="265" r:id="rId22"/>
+    <p:sldId id="266" r:id="rId23"/>
+    <p:sldId id="267" r:id="rId24"/>
+    <p:sldId id="268" r:id="rId25"/>
+    <p:sldId id="269" r:id="rId26"/>
+    <p:sldId id="270" r:id="rId27"/>
   </p:sldIdLst>
   <p:sldSz cx="18288000" cy="10287000"/>
   <p:notesSz cx="7559675" cy="10691813"/>
@@ -128,6 +129,11 @@
       </a:defRPr>
     </a:lvl9pPr>
   </p:defaultTextStyle>
+  <p:extLst>
+    <p:ext uri="{EFAFB233-063F-42B5-8137-9DF3F51BA10A}">
+      <p15:sldGuideLst xmlns:p15="http://schemas.microsoft.com/office/powerpoint/2012/main"/>
+    </p:ext>
+  </p:extLst>
 </p:presentation>
 </file>
 
@@ -8554,6 +8560,829 @@
     </p:bg>
     <p:spTree>
       <p:nvGrpSpPr>
+        <p:cNvPr id="1" name="">
+          <a:extLst>
+            <a:ext uri="{FF2B5EF4-FFF2-40B4-BE49-F238E27FC236}">
+              <a16:creationId xmlns:a16="http://schemas.microsoft.com/office/drawing/2014/main" id="{247135F1-C225-AB31-44C1-827B01C4EFC3}"/>
+            </a:ext>
+          </a:extLst>
+        </p:cNvPr>
+        <p:cNvGrpSpPr/>
+        <p:nvPr/>
+      </p:nvGrpSpPr>
+      <p:grpSpPr>
+        <a:xfrm>
+          <a:off x="0" y="0"/>
+          <a:ext cx="0" cy="0"/>
+          <a:chOff x="0" y="0"/>
+          <a:chExt cx="0" cy="0"/>
+        </a:xfrm>
+      </p:grpSpPr>
+      <p:sp>
+        <p:nvSpPr>
+          <p:cNvPr id="129" name="TextBox 31">
+            <a:extLst>
+              <a:ext uri="{FF2B5EF4-FFF2-40B4-BE49-F238E27FC236}">
+                <a16:creationId xmlns:a16="http://schemas.microsoft.com/office/drawing/2014/main" id="{D2014C6E-D0F9-B267-0123-05179EC0D4AB}"/>
+              </a:ext>
+            </a:extLst>
+          </p:cNvPr>
+          <p:cNvSpPr/>
+          <p:nvPr/>
+        </p:nvSpPr>
+        <p:spPr>
+          <a:xfrm>
+            <a:off x="887040" y="731520"/>
+            <a:ext cx="14285520" cy="1371240"/>
+          </a:xfrm>
+          <a:prstGeom prst="rect">
+            <a:avLst/>
+          </a:prstGeom>
+          <a:noFill/>
+          <a:ln w="0">
+            <a:noFill/>
+          </a:ln>
+        </p:spPr>
+        <p:style>
+          <a:lnRef idx="0">
+            <a:scrgbClr r="0" g="0" b="0"/>
+          </a:lnRef>
+          <a:fillRef idx="0">
+            <a:scrgbClr r="0" g="0" b="0"/>
+          </a:fillRef>
+          <a:effectRef idx="0">
+            <a:scrgbClr r="0" g="0" b="0"/>
+          </a:effectRef>
+          <a:fontRef idx="minor"/>
+        </p:style>
+        <p:txBody>
+          <a:bodyPr lIns="0" tIns="0" rIns="0" bIns="0" anchor="t">
+            <a:spAutoFit/>
+          </a:bodyPr>
+          <a:lstStyle/>
+          <a:p>
+            <a:pPr defTabSz="914400">
+              <a:lnSpc>
+                <a:spcPts val="10800"/>
+              </a:lnSpc>
+            </a:pPr>
+            <a:r>
+              <a:rPr lang="en-US" sz="9000" b="1" strike="noStrike" spc="-1">
+                <a:solidFill>
+                  <a:srgbClr val="FFFFFF"/>
+                </a:solidFill>
+                <a:latin typeface="Century Gothic Paneuropean Heavy"/>
+                <a:ea typeface="Century Gothic Paneuropean Heavy"/>
+              </a:rPr>
+              <a:t>Operators and </a:t>
+            </a:r>
+            <a:r>
+              <a:rPr lang="en-US" sz="9000" b="1" strike="noStrike" spc="-1">
+                <a:solidFill>
+                  <a:srgbClr val="FFBD00"/>
+                </a:solidFill>
+                <a:latin typeface="Century Gothic Paneuropean Heavy"/>
+                <a:ea typeface="Century Gothic Paneuropean Heavy"/>
+              </a:rPr>
+              <a:t>Origins</a:t>
+            </a:r>
+            <a:endParaRPr lang="en-US" sz="9000" b="0" strike="noStrike" spc="-1">
+              <a:solidFill>
+                <a:srgbClr val="FFFFFF"/>
+              </a:solidFill>
+              <a:latin typeface="Arial"/>
+            </a:endParaRPr>
+          </a:p>
+        </p:txBody>
+      </p:sp>
+      <p:sp>
+        <p:nvSpPr>
+          <p:cNvPr id="131" name="TextBox 35">
+            <a:extLst>
+              <a:ext uri="{FF2B5EF4-FFF2-40B4-BE49-F238E27FC236}">
+                <a16:creationId xmlns:a16="http://schemas.microsoft.com/office/drawing/2014/main" id="{2B9B9650-D4E6-234D-E2CA-825399B996EB}"/>
+              </a:ext>
+            </a:extLst>
+          </p:cNvPr>
+          <p:cNvSpPr/>
+          <p:nvPr/>
+        </p:nvSpPr>
+        <p:spPr>
+          <a:xfrm>
+            <a:off x="914400" y="2611080"/>
+            <a:ext cx="4030560" cy="487440"/>
+          </a:xfrm>
+          <a:prstGeom prst="rect">
+            <a:avLst/>
+          </a:prstGeom>
+          <a:noFill/>
+          <a:ln w="0">
+            <a:noFill/>
+          </a:ln>
+        </p:spPr>
+        <p:style>
+          <a:lnRef idx="0">
+            <a:scrgbClr r="0" g="0" b="0"/>
+          </a:lnRef>
+          <a:fillRef idx="0">
+            <a:scrgbClr r="0" g="0" b="0"/>
+          </a:fillRef>
+          <a:effectRef idx="0">
+            <a:scrgbClr r="0" g="0" b="0"/>
+          </a:effectRef>
+          <a:fontRef idx="minor"/>
+        </p:style>
+        <p:txBody>
+          <a:bodyPr lIns="0" tIns="0" rIns="0" bIns="0" anchor="t">
+            <a:spAutoFit/>
+          </a:bodyPr>
+          <a:lstStyle/>
+          <a:p>
+            <a:pPr defTabSz="914400">
+              <a:lnSpc>
+                <a:spcPts val="3841"/>
+              </a:lnSpc>
+              <a:tabLst>
+                <a:tab pos="0" algn="l"/>
+              </a:tabLst>
+            </a:pPr>
+            <a:r>
+              <a:rPr lang="en-US" sz="3200" b="1" strike="noStrike" spc="-1">
+                <a:solidFill>
+                  <a:srgbClr val="9AD3F3"/>
+                </a:solidFill>
+                <a:latin typeface="Open Sauce Semi-Bold"/>
+                <a:ea typeface="Open Sauce Semi-Bold"/>
+              </a:rPr>
+              <a:t>Starlink</a:t>
+            </a:r>
+            <a:endParaRPr lang="en-US" sz="3200" b="0" strike="noStrike" spc="-1">
+              <a:solidFill>
+                <a:srgbClr val="FFFFFF"/>
+              </a:solidFill>
+              <a:latin typeface="Arial"/>
+            </a:endParaRPr>
+          </a:p>
+        </p:txBody>
+      </p:sp>
+      <p:sp>
+        <p:nvSpPr>
+          <p:cNvPr id="132" name="TextBox 36">
+            <a:extLst>
+              <a:ext uri="{FF2B5EF4-FFF2-40B4-BE49-F238E27FC236}">
+                <a16:creationId xmlns:a16="http://schemas.microsoft.com/office/drawing/2014/main" id="{25CAEF5D-17D7-226B-A976-B0FFCBCA1B1D}"/>
+              </a:ext>
+            </a:extLst>
+          </p:cNvPr>
+          <p:cNvSpPr/>
+          <p:nvPr/>
+        </p:nvSpPr>
+        <p:spPr>
+          <a:xfrm>
+            <a:off x="914400" y="3292560"/>
+            <a:ext cx="3868560" cy="1279440"/>
+          </a:xfrm>
+          <a:prstGeom prst="rect">
+            <a:avLst/>
+          </a:prstGeom>
+          <a:noFill/>
+          <a:ln w="0">
+            <a:noFill/>
+          </a:ln>
+        </p:spPr>
+        <p:style>
+          <a:lnRef idx="0">
+            <a:scrgbClr r="0" g="0" b="0"/>
+          </a:lnRef>
+          <a:fillRef idx="0">
+            <a:scrgbClr r="0" g="0" b="0"/>
+          </a:fillRef>
+          <a:effectRef idx="0">
+            <a:scrgbClr r="0" g="0" b="0"/>
+          </a:effectRef>
+          <a:fontRef idx="minor"/>
+        </p:style>
+        <p:txBody>
+          <a:bodyPr lIns="0" tIns="0" rIns="0" bIns="0" anchor="t">
+            <a:spAutoFit/>
+          </a:bodyPr>
+          <a:lstStyle/>
+          <a:p>
+            <a:pPr defTabSz="914400">
+              <a:lnSpc>
+                <a:spcPts val="3359"/>
+              </a:lnSpc>
+              <a:tabLst>
+                <a:tab pos="0" algn="l"/>
+              </a:tabLst>
+            </a:pPr>
+            <a:r>
+              <a:rPr lang="en-US" sz="2400" b="0" strike="noStrike" spc="-1">
+                <a:solidFill>
+                  <a:srgbClr val="FFFFFF"/>
+                </a:solidFill>
+                <a:latin typeface="Open Sauce"/>
+                <a:ea typeface="Open Sauce"/>
+              </a:rPr>
+              <a:t>First launch: </a:t>
+            </a:r>
+            <a:r>
+              <a:rPr lang="en-US" sz="2400" b="1" strike="noStrike" spc="-1">
+                <a:solidFill>
+                  <a:srgbClr val="FFFFFF"/>
+                </a:solidFill>
+                <a:latin typeface="Open Sauce"/>
+                <a:ea typeface="Open Sauce"/>
+              </a:rPr>
+              <a:t>2018</a:t>
+            </a:r>
+            <a:endParaRPr lang="en-US" sz="2400" b="0" strike="noStrike" spc="-1">
+              <a:solidFill>
+                <a:srgbClr val="FFFFFF"/>
+              </a:solidFill>
+              <a:latin typeface="Arial"/>
+            </a:endParaRPr>
+          </a:p>
+          <a:p>
+            <a:pPr defTabSz="914400">
+              <a:lnSpc>
+                <a:spcPts val="3359"/>
+              </a:lnSpc>
+              <a:tabLst>
+                <a:tab pos="0" algn="l"/>
+              </a:tabLst>
+            </a:pPr>
+            <a:r>
+              <a:rPr lang="en-US" sz="2400" b="0" strike="noStrike" spc="-1">
+                <a:solidFill>
+                  <a:srgbClr val="FFFFFF"/>
+                </a:solidFill>
+                <a:latin typeface="Open Sauce"/>
+                <a:ea typeface="Open Sauce"/>
+              </a:rPr>
+              <a:t>Total launches: </a:t>
+            </a:r>
+            <a:r>
+              <a:rPr lang="en-US" sz="2400" b="1" strike="noStrike" spc="-1">
+                <a:solidFill>
+                  <a:srgbClr val="FFFFFF"/>
+                </a:solidFill>
+                <a:latin typeface="Open Sauce"/>
+                <a:ea typeface="Open Sauce"/>
+              </a:rPr>
+              <a:t>10,413</a:t>
+            </a:r>
+            <a:endParaRPr lang="en-US" sz="2400" b="0" strike="noStrike" spc="-1">
+              <a:solidFill>
+                <a:srgbClr val="FFFFFF"/>
+              </a:solidFill>
+              <a:latin typeface="Arial"/>
+            </a:endParaRPr>
+          </a:p>
+          <a:p>
+            <a:pPr defTabSz="914400">
+              <a:lnSpc>
+                <a:spcPts val="3359"/>
+              </a:lnSpc>
+              <a:tabLst>
+                <a:tab pos="0" algn="l"/>
+              </a:tabLst>
+            </a:pPr>
+            <a:r>
+              <a:rPr lang="en-US" sz="2400" b="0" strike="noStrike" spc="-1">
+                <a:solidFill>
+                  <a:srgbClr val="FFFFFF"/>
+                </a:solidFill>
+                <a:latin typeface="Open Sauce"/>
+                <a:ea typeface="Open Sauce"/>
+              </a:rPr>
+              <a:t>Purpose: </a:t>
+            </a:r>
+            <a:r>
+              <a:rPr lang="en-US" sz="2400" b="1" strike="noStrike" spc="-1">
+                <a:solidFill>
+                  <a:srgbClr val="FFFFFF"/>
+                </a:solidFill>
+                <a:latin typeface="Open Sauce"/>
+                <a:ea typeface="Open Sauce"/>
+              </a:rPr>
+              <a:t>Comms</a:t>
+            </a:r>
+            <a:endParaRPr lang="en-US" sz="2400" b="0" strike="noStrike" spc="-1">
+              <a:solidFill>
+                <a:srgbClr val="FFFFFF"/>
+              </a:solidFill>
+              <a:latin typeface="Arial"/>
+            </a:endParaRPr>
+          </a:p>
+        </p:txBody>
+      </p:sp>
+      <p:sp>
+        <p:nvSpPr>
+          <p:cNvPr id="133" name="TextBox 37">
+            <a:extLst>
+              <a:ext uri="{FF2B5EF4-FFF2-40B4-BE49-F238E27FC236}">
+                <a16:creationId xmlns:a16="http://schemas.microsoft.com/office/drawing/2014/main" id="{FA07EFC5-DEDF-E519-AD22-FB7407AFBAF8}"/>
+              </a:ext>
+            </a:extLst>
+          </p:cNvPr>
+          <p:cNvSpPr/>
+          <p:nvPr/>
+        </p:nvSpPr>
+        <p:spPr>
+          <a:xfrm>
+            <a:off x="914400" y="5125680"/>
+            <a:ext cx="4030560" cy="487440"/>
+          </a:xfrm>
+          <a:prstGeom prst="rect">
+            <a:avLst/>
+          </a:prstGeom>
+          <a:noFill/>
+          <a:ln w="0">
+            <a:noFill/>
+          </a:ln>
+        </p:spPr>
+        <p:style>
+          <a:lnRef idx="0">
+            <a:scrgbClr r="0" g="0" b="0"/>
+          </a:lnRef>
+          <a:fillRef idx="0">
+            <a:scrgbClr r="0" g="0" b="0"/>
+          </a:fillRef>
+          <a:effectRef idx="0">
+            <a:scrgbClr r="0" g="0" b="0"/>
+          </a:effectRef>
+          <a:fontRef idx="minor"/>
+        </p:style>
+        <p:txBody>
+          <a:bodyPr lIns="0" tIns="0" rIns="0" bIns="0" anchor="t">
+            <a:spAutoFit/>
+          </a:bodyPr>
+          <a:lstStyle/>
+          <a:p>
+            <a:pPr defTabSz="914400">
+              <a:lnSpc>
+                <a:spcPts val="3841"/>
+              </a:lnSpc>
+              <a:tabLst>
+                <a:tab pos="0" algn="l"/>
+              </a:tabLst>
+            </a:pPr>
+            <a:r>
+              <a:rPr lang="en-US" sz="3200" b="1" strike="noStrike" spc="-1">
+                <a:solidFill>
+                  <a:srgbClr val="9AD3F3"/>
+                </a:solidFill>
+                <a:latin typeface="Open Sauce Semi-Bold"/>
+                <a:ea typeface="Open Sauce Semi-Bold"/>
+              </a:rPr>
+              <a:t>OneWeb</a:t>
+            </a:r>
+            <a:endParaRPr lang="en-US" sz="3200" b="0" strike="noStrike" spc="-1">
+              <a:solidFill>
+                <a:srgbClr val="FFFFFF"/>
+              </a:solidFill>
+              <a:latin typeface="Arial"/>
+            </a:endParaRPr>
+          </a:p>
+        </p:txBody>
+      </p:sp>
+      <p:sp>
+        <p:nvSpPr>
+          <p:cNvPr id="134" name="TextBox 38">
+            <a:extLst>
+              <a:ext uri="{FF2B5EF4-FFF2-40B4-BE49-F238E27FC236}">
+                <a16:creationId xmlns:a16="http://schemas.microsoft.com/office/drawing/2014/main" id="{1727FC38-862F-3A4D-EEB9-55F06B0C0159}"/>
+              </a:ext>
+            </a:extLst>
+          </p:cNvPr>
+          <p:cNvSpPr/>
+          <p:nvPr/>
+        </p:nvSpPr>
+        <p:spPr>
+          <a:xfrm>
+            <a:off x="914400" y="5807160"/>
+            <a:ext cx="3868560" cy="1279440"/>
+          </a:xfrm>
+          <a:prstGeom prst="rect">
+            <a:avLst/>
+          </a:prstGeom>
+          <a:noFill/>
+          <a:ln w="0">
+            <a:noFill/>
+          </a:ln>
+        </p:spPr>
+        <p:style>
+          <a:lnRef idx="0">
+            <a:scrgbClr r="0" g="0" b="0"/>
+          </a:lnRef>
+          <a:fillRef idx="0">
+            <a:scrgbClr r="0" g="0" b="0"/>
+          </a:fillRef>
+          <a:effectRef idx="0">
+            <a:scrgbClr r="0" g="0" b="0"/>
+          </a:effectRef>
+          <a:fontRef idx="minor"/>
+        </p:style>
+        <p:txBody>
+          <a:bodyPr lIns="0" tIns="0" rIns="0" bIns="0" anchor="t">
+            <a:spAutoFit/>
+          </a:bodyPr>
+          <a:lstStyle/>
+          <a:p>
+            <a:pPr defTabSz="914400">
+              <a:lnSpc>
+                <a:spcPts val="3359"/>
+              </a:lnSpc>
+              <a:tabLst>
+                <a:tab pos="0" algn="l"/>
+              </a:tabLst>
+            </a:pPr>
+            <a:r>
+              <a:rPr lang="en-US" sz="2400" b="0" strike="noStrike" spc="-1">
+                <a:solidFill>
+                  <a:srgbClr val="FFFFFF"/>
+                </a:solidFill>
+                <a:latin typeface="Open Sauce"/>
+                <a:ea typeface="Open Sauce"/>
+              </a:rPr>
+              <a:t>First launch: </a:t>
+            </a:r>
+            <a:r>
+              <a:rPr lang="en-US" sz="2400" b="1" strike="noStrike" spc="-1">
+                <a:solidFill>
+                  <a:srgbClr val="FFFFFF"/>
+                </a:solidFill>
+                <a:latin typeface="Open Sauce"/>
+                <a:ea typeface="Open Sauce"/>
+              </a:rPr>
+              <a:t>2019</a:t>
+            </a:r>
+            <a:endParaRPr lang="en-US" sz="2400" b="0" strike="noStrike" spc="-1">
+              <a:solidFill>
+                <a:srgbClr val="FFFFFF"/>
+              </a:solidFill>
+              <a:latin typeface="Arial"/>
+            </a:endParaRPr>
+          </a:p>
+          <a:p>
+            <a:pPr defTabSz="914400">
+              <a:lnSpc>
+                <a:spcPts val="3359"/>
+              </a:lnSpc>
+              <a:tabLst>
+                <a:tab pos="0" algn="l"/>
+              </a:tabLst>
+            </a:pPr>
+            <a:r>
+              <a:rPr lang="en-US" sz="2400" b="0" strike="noStrike" spc="-1">
+                <a:solidFill>
+                  <a:srgbClr val="FFFFFF"/>
+                </a:solidFill>
+                <a:latin typeface="Open Sauce"/>
+                <a:ea typeface="Open Sauce"/>
+              </a:rPr>
+              <a:t>Total launches: </a:t>
+            </a:r>
+            <a:r>
+              <a:rPr lang="en-US" sz="2400" b="1" strike="noStrike" spc="-1">
+                <a:solidFill>
+                  <a:srgbClr val="FFFFFF"/>
+                </a:solidFill>
+                <a:latin typeface="Open Sauce"/>
+                <a:ea typeface="Open Sauce"/>
+              </a:rPr>
+              <a:t>656</a:t>
+            </a:r>
+            <a:endParaRPr lang="en-US" sz="2400" b="0" strike="noStrike" spc="-1">
+              <a:solidFill>
+                <a:srgbClr val="FFFFFF"/>
+              </a:solidFill>
+              <a:latin typeface="Arial"/>
+            </a:endParaRPr>
+          </a:p>
+          <a:p>
+            <a:pPr defTabSz="914400">
+              <a:lnSpc>
+                <a:spcPts val="3359"/>
+              </a:lnSpc>
+              <a:tabLst>
+                <a:tab pos="0" algn="l"/>
+              </a:tabLst>
+            </a:pPr>
+            <a:r>
+              <a:rPr lang="en-US" sz="2400" b="0" strike="noStrike" spc="-1">
+                <a:solidFill>
+                  <a:srgbClr val="FFFFFF"/>
+                </a:solidFill>
+                <a:latin typeface="Open Sauce"/>
+                <a:ea typeface="Open Sauce"/>
+              </a:rPr>
+              <a:t>Purpose: </a:t>
+            </a:r>
+            <a:r>
+              <a:rPr lang="en-US" sz="2400" b="1" strike="noStrike" spc="-1">
+                <a:solidFill>
+                  <a:srgbClr val="FFFFFF"/>
+                </a:solidFill>
+                <a:latin typeface="Open Sauce"/>
+                <a:ea typeface="Open Sauce"/>
+              </a:rPr>
+              <a:t>Internet</a:t>
+            </a:r>
+            <a:endParaRPr lang="en-US" sz="2400" b="0" strike="noStrike" spc="-1">
+              <a:solidFill>
+                <a:srgbClr val="FFFFFF"/>
+              </a:solidFill>
+              <a:latin typeface="Arial"/>
+            </a:endParaRPr>
+          </a:p>
+        </p:txBody>
+      </p:sp>
+      <p:sp>
+        <p:nvSpPr>
+          <p:cNvPr id="135" name="TextBox 39">
+            <a:extLst>
+              <a:ext uri="{FF2B5EF4-FFF2-40B4-BE49-F238E27FC236}">
+                <a16:creationId xmlns:a16="http://schemas.microsoft.com/office/drawing/2014/main" id="{43EFBABA-DA9A-CE69-6FDD-070C640700FE}"/>
+              </a:ext>
+            </a:extLst>
+          </p:cNvPr>
+          <p:cNvSpPr/>
+          <p:nvPr/>
+        </p:nvSpPr>
+        <p:spPr>
+          <a:xfrm>
+            <a:off x="914400" y="7640280"/>
+            <a:ext cx="4030560" cy="487440"/>
+          </a:xfrm>
+          <a:prstGeom prst="rect">
+            <a:avLst/>
+          </a:prstGeom>
+          <a:noFill/>
+          <a:ln w="0">
+            <a:noFill/>
+          </a:ln>
+        </p:spPr>
+        <p:style>
+          <a:lnRef idx="0">
+            <a:scrgbClr r="0" g="0" b="0"/>
+          </a:lnRef>
+          <a:fillRef idx="0">
+            <a:scrgbClr r="0" g="0" b="0"/>
+          </a:fillRef>
+          <a:effectRef idx="0">
+            <a:scrgbClr r="0" g="0" b="0"/>
+          </a:effectRef>
+          <a:fontRef idx="minor"/>
+        </p:style>
+        <p:txBody>
+          <a:bodyPr lIns="0" tIns="0" rIns="0" bIns="0" anchor="t">
+            <a:spAutoFit/>
+          </a:bodyPr>
+          <a:lstStyle/>
+          <a:p>
+            <a:pPr defTabSz="914400">
+              <a:lnSpc>
+                <a:spcPts val="3841"/>
+              </a:lnSpc>
+              <a:tabLst>
+                <a:tab pos="0" algn="l"/>
+              </a:tabLst>
+            </a:pPr>
+            <a:r>
+              <a:rPr lang="en-US" sz="3200" b="1" strike="noStrike" spc="-1">
+                <a:solidFill>
+                  <a:srgbClr val="9AD3F3"/>
+                </a:solidFill>
+                <a:latin typeface="Open Sauce Semi-Bold"/>
+                <a:ea typeface="Open Sauce Semi-Bold"/>
+              </a:rPr>
+              <a:t>Flock</a:t>
+            </a:r>
+            <a:endParaRPr lang="en-US" sz="3200" b="0" strike="noStrike" spc="-1">
+              <a:solidFill>
+                <a:srgbClr val="FFFFFF"/>
+              </a:solidFill>
+              <a:latin typeface="Arial"/>
+            </a:endParaRPr>
+          </a:p>
+        </p:txBody>
+      </p:sp>
+      <p:sp>
+        <p:nvSpPr>
+          <p:cNvPr id="136" name="TextBox 40">
+            <a:extLst>
+              <a:ext uri="{FF2B5EF4-FFF2-40B4-BE49-F238E27FC236}">
+                <a16:creationId xmlns:a16="http://schemas.microsoft.com/office/drawing/2014/main" id="{D97AE002-4657-FD55-430D-A2F9022C6CDB}"/>
+              </a:ext>
+            </a:extLst>
+          </p:cNvPr>
+          <p:cNvSpPr/>
+          <p:nvPr/>
+        </p:nvSpPr>
+        <p:spPr>
+          <a:xfrm>
+            <a:off x="914400" y="8321760"/>
+            <a:ext cx="4343040" cy="1279800"/>
+          </a:xfrm>
+          <a:prstGeom prst="rect">
+            <a:avLst/>
+          </a:prstGeom>
+          <a:noFill/>
+          <a:ln w="0">
+            <a:noFill/>
+          </a:ln>
+        </p:spPr>
+        <p:style>
+          <a:lnRef idx="0">
+            <a:scrgbClr r="0" g="0" b="0"/>
+          </a:lnRef>
+          <a:fillRef idx="0">
+            <a:scrgbClr r="0" g="0" b="0"/>
+          </a:fillRef>
+          <a:effectRef idx="0">
+            <a:scrgbClr r="0" g="0" b="0"/>
+          </a:effectRef>
+          <a:fontRef idx="minor"/>
+        </p:style>
+        <p:txBody>
+          <a:bodyPr lIns="0" tIns="0" rIns="0" bIns="0" anchor="t">
+            <a:spAutoFit/>
+          </a:bodyPr>
+          <a:lstStyle/>
+          <a:p>
+            <a:pPr defTabSz="914400">
+              <a:lnSpc>
+                <a:spcPts val="3359"/>
+              </a:lnSpc>
+              <a:tabLst>
+                <a:tab pos="0" algn="l"/>
+              </a:tabLst>
+            </a:pPr>
+            <a:r>
+              <a:rPr lang="en-US" sz="2400" b="0" strike="noStrike" spc="-1">
+                <a:solidFill>
+                  <a:srgbClr val="FFFFFF"/>
+                </a:solidFill>
+                <a:latin typeface="Open Sauce"/>
+                <a:ea typeface="Open Sauce"/>
+              </a:rPr>
+              <a:t>First launch: </a:t>
+            </a:r>
+            <a:r>
+              <a:rPr lang="en-US" sz="2400" b="1" strike="noStrike" spc="-1">
+                <a:solidFill>
+                  <a:srgbClr val="FFFFFF"/>
+                </a:solidFill>
+                <a:latin typeface="Open Sauce"/>
+                <a:ea typeface="Open Sauce"/>
+              </a:rPr>
+              <a:t>2015</a:t>
+            </a:r>
+            <a:endParaRPr lang="en-US" sz="2400" b="0" strike="noStrike" spc="-1">
+              <a:solidFill>
+                <a:srgbClr val="FFFFFF"/>
+              </a:solidFill>
+              <a:latin typeface="Arial"/>
+            </a:endParaRPr>
+          </a:p>
+          <a:p>
+            <a:pPr defTabSz="914400">
+              <a:lnSpc>
+                <a:spcPts val="3359"/>
+              </a:lnSpc>
+              <a:tabLst>
+                <a:tab pos="0" algn="l"/>
+              </a:tabLst>
+            </a:pPr>
+            <a:r>
+              <a:rPr lang="en-US" sz="2400" b="0" strike="noStrike" spc="-1">
+                <a:solidFill>
+                  <a:srgbClr val="FFFFFF"/>
+                </a:solidFill>
+                <a:latin typeface="Open Sauce"/>
+                <a:ea typeface="Open Sauce"/>
+              </a:rPr>
+              <a:t>Total launches: </a:t>
+            </a:r>
+            <a:r>
+              <a:rPr lang="en-US" sz="2400" b="1" strike="noStrike" spc="-1">
+                <a:solidFill>
+                  <a:srgbClr val="FFFFFF"/>
+                </a:solidFill>
+                <a:latin typeface="Open Sauce"/>
+                <a:ea typeface="Open Sauce"/>
+              </a:rPr>
+              <a:t>548</a:t>
+            </a:r>
+            <a:endParaRPr lang="en-US" sz="2400" b="0" strike="noStrike" spc="-1">
+              <a:solidFill>
+                <a:srgbClr val="FFFFFF"/>
+              </a:solidFill>
+              <a:latin typeface="Arial"/>
+            </a:endParaRPr>
+          </a:p>
+          <a:p>
+            <a:pPr defTabSz="914400">
+              <a:lnSpc>
+                <a:spcPts val="3359"/>
+              </a:lnSpc>
+              <a:tabLst>
+                <a:tab pos="0" algn="l"/>
+              </a:tabLst>
+            </a:pPr>
+            <a:r>
+              <a:rPr lang="en-US" sz="2400" b="0" strike="noStrike" spc="-1">
+                <a:solidFill>
+                  <a:srgbClr val="FFFFFF"/>
+                </a:solidFill>
+                <a:latin typeface="Open Sauce"/>
+                <a:ea typeface="Open Sauce"/>
+              </a:rPr>
+              <a:t>Purpose: </a:t>
+            </a:r>
+            <a:r>
+              <a:rPr lang="en-US" sz="2400" b="1" strike="noStrike" spc="-1">
+                <a:solidFill>
+                  <a:srgbClr val="FFFFFF"/>
+                </a:solidFill>
+                <a:latin typeface="Open Sauce"/>
+                <a:ea typeface="Open Sauce"/>
+              </a:rPr>
+              <a:t>Earth Observation</a:t>
+            </a:r>
+            <a:endParaRPr lang="en-US" sz="2400" b="0" strike="noStrike" spc="-1">
+              <a:solidFill>
+                <a:srgbClr val="FFFFFF"/>
+              </a:solidFill>
+              <a:latin typeface="Arial"/>
+            </a:endParaRPr>
+          </a:p>
+        </p:txBody>
+      </p:sp>
+      <p:pic>
+        <p:nvPicPr>
+          <p:cNvPr id="3" name="Picture 2" descr="A screenshot of a computer screen&#10;&#10;AI-generated content may be incorrect.">
+            <a:extLst>
+              <a:ext uri="{FF2B5EF4-FFF2-40B4-BE49-F238E27FC236}">
+                <a16:creationId xmlns:a16="http://schemas.microsoft.com/office/drawing/2014/main" id="{9A490C5D-3EF7-1729-A620-AD8ED7CAB72D}"/>
+              </a:ext>
+            </a:extLst>
+          </p:cNvPr>
+          <p:cNvPicPr>
+            <a:picLocks noChangeAspect="1"/>
+          </p:cNvPicPr>
+          <p:nvPr/>
+        </p:nvPicPr>
+        <p:blipFill>
+          <a:blip r:embed="rId2">
+            <a:extLst>
+              <a:ext uri="{28A0092B-C50C-407E-A947-70E740481C1C}">
+                <a14:useLocalDpi xmlns:a14="http://schemas.microsoft.com/office/drawing/2010/main" val="0"/>
+              </a:ext>
+            </a:extLst>
+          </a:blip>
+          <a:stretch>
+            <a:fillRect/>
+          </a:stretch>
+        </p:blipFill>
+        <p:spPr>
+          <a:xfrm>
+            <a:off x="4944960" y="2115920"/>
+            <a:ext cx="12760177" cy="7745426"/>
+          </a:xfrm>
+          <a:prstGeom prst="rect">
+            <a:avLst/>
+          </a:prstGeom>
+        </p:spPr>
+      </p:pic>
+    </p:spTree>
+    <p:extLst>
+      <p:ext uri="{BB962C8B-B14F-4D97-AF65-F5344CB8AC3E}">
+        <p14:creationId xmlns:p14="http://schemas.microsoft.com/office/powerpoint/2010/main" val="56980370"/>
+      </p:ext>
+    </p:extLst>
+  </p:cSld>
+  <p:clrMapOvr>
+    <a:masterClrMapping/>
+  </p:clrMapOvr>
+</p:sld>
+</file>
+
+<file path=ppt/slides/slide11.xml><?xml version="1.0" encoding="utf-8"?>
+<p:sld xmlns:a="http://schemas.openxmlformats.org/drawingml/2006/main" xmlns:r="http://schemas.openxmlformats.org/officeDocument/2006/relationships" xmlns:p="http://schemas.openxmlformats.org/presentationml/2006/main">
+  <p:cSld>
+    <p:bg>
+      <p:bgPr>
+        <a:solidFill>
+          <a:srgbClr val="0F1A38"/>
+        </a:solidFill>
+        <a:effectLst/>
+      </p:bgPr>
+    </p:bg>
+    <p:spTree>
+      <p:nvGrpSpPr>
         <p:cNvPr id="1" name=""/>
         <p:cNvGrpSpPr/>
         <p:nvPr/>
@@ -9093,7 +9922,7 @@
 </p:sld>
 </file>
 
-<file path=ppt/slides/slide11.xml><?xml version="1.0" encoding="utf-8"?>
+<file path=ppt/slides/slide12.xml><?xml version="1.0" encoding="utf-8"?>
 <p:sld xmlns:a="http://schemas.openxmlformats.org/drawingml/2006/main" xmlns:r="http://schemas.openxmlformats.org/officeDocument/2006/relationships" xmlns:p="http://schemas.openxmlformats.org/presentationml/2006/main">
   <p:cSld>
     <p:bg>
@@ -9715,7 +10544,7 @@
 </p:sld>
 </file>
 
-<file path=ppt/slides/slide12.xml><?xml version="1.0" encoding="utf-8"?>
+<file path=ppt/slides/slide13.xml><?xml version="1.0" encoding="utf-8"?>
 <p:sld xmlns:a="http://schemas.openxmlformats.org/drawingml/2006/main" xmlns:r="http://schemas.openxmlformats.org/officeDocument/2006/relationships" xmlns:p="http://schemas.openxmlformats.org/presentationml/2006/main">
   <p:cSld>
     <p:bg>
@@ -10589,7 +11418,7 @@
 </p:sld>
 </file>
 
-<file path=ppt/slides/slide13.xml><?xml version="1.0" encoding="utf-8"?>
+<file path=ppt/slides/slide14.xml><?xml version="1.0" encoding="utf-8"?>
 <p:sld xmlns:a="http://schemas.openxmlformats.org/drawingml/2006/main" xmlns:r="http://schemas.openxmlformats.org/officeDocument/2006/relationships" xmlns:p="http://schemas.openxmlformats.org/presentationml/2006/main">
   <p:cSld>
     <p:bg>
@@ -11205,7 +12034,7 @@
 </p:sld>
 </file>
 
-<file path=ppt/slides/slide14.xml><?xml version="1.0" encoding="utf-8"?>
+<file path=ppt/slides/slide15.xml><?xml version="1.0" encoding="utf-8"?>
 <p:sld xmlns:a="http://schemas.openxmlformats.org/drawingml/2006/main" xmlns:r="http://schemas.openxmlformats.org/officeDocument/2006/relationships" xmlns:p="http://schemas.openxmlformats.org/presentationml/2006/main">
   <p:cSld>
     <p:bg>
@@ -12017,7 +12846,7 @@
 </p:sld>
 </file>
 
-<file path=ppt/slides/slide15.xml><?xml version="1.0" encoding="utf-8"?>
+<file path=ppt/slides/slide16.xml><?xml version="1.0" encoding="utf-8"?>
 <p:sld xmlns:a="http://schemas.openxmlformats.org/drawingml/2006/main" xmlns:r="http://schemas.openxmlformats.org/officeDocument/2006/relationships" xmlns:p="http://schemas.openxmlformats.org/presentationml/2006/main">
   <p:cSld>
     <p:bg>
@@ -16088,7 +16917,7 @@
               </a:tabLst>
             </a:pPr>
             <a:r>
-              <a:rPr lang="en-US" sz="3200" b="1" strike="noStrike" spc="-1">
+              <a:rPr lang="en-US" sz="3200" b="1" strike="noStrike" spc="-1" dirty="0">
                 <a:solidFill>
                   <a:srgbClr val="9AD3F3"/>
                 </a:solidFill>
@@ -16097,7 +16926,7 @@
               </a:rPr>
               <a:t>Count of Objects In Low Earth Orbit</a:t>
             </a:r>
-            <a:endParaRPr lang="en-US" sz="3200" b="0" strike="noStrike" spc="-1">
+            <a:endParaRPr lang="en-US" sz="3200" b="0" strike="noStrike" spc="-1" dirty="0">
               <a:solidFill>
                 <a:srgbClr val="FFFFFF"/>
               </a:solidFill>
@@ -17430,29 +18259,6 @@
           </a:p>
         </p:txBody>
       </p:sp>
-      <p:pic>
-        <p:nvPicPr>
-          <p:cNvPr id="130" name="Picture 129"/>
-          <p:cNvPicPr/>
-          <p:nvPr/>
-        </p:nvPicPr>
-        <p:blipFill>
-          <a:blip r:embed="rId2"/>
-          <a:stretch/>
-        </p:blipFill>
-        <p:spPr>
-          <a:xfrm>
-            <a:off x="5257800" y="2330280"/>
-            <a:ext cx="12581280" cy="7499160"/>
-          </a:xfrm>
-          <a:prstGeom prst="rect">
-            <a:avLst/>
-          </a:prstGeom>
-          <a:ln w="0">
-            <a:noFill/>
-          </a:ln>
-        </p:spPr>
-      </p:pic>
       <p:sp>
         <p:nvSpPr>
           <p:cNvPr id="131" name="TextBox 35"/>
